--- a/docs/slides/template-uit.pptx
+++ b/docs/slides/template-uit.pptx
@@ -4432,7 +4432,7 @@
             <a:normAutofit/>
           </a:bodyPr>
           <a:lstStyle>
-            <a:lvl1pPr indent="-406400" lvl="0" marL="457200" algn="just">
+            <a:lvl1pPr indent="-406400" lvl="0" marL="457200" algn="l">
               <a:lnSpc>
                 <a:spcPct val="130000"/>
               </a:lnSpc>
@@ -4454,7 +4454,7 @@
                 <a:sym typeface="Arial"/>
               </a:defRPr>
             </a:lvl1pPr>
-            <a:lvl2pPr indent="-381000" lvl="1" marL="914400" algn="just">
+            <a:lvl2pPr indent="-381000" lvl="1" marL="914400" algn="l">
               <a:lnSpc>
                 <a:spcPct val="130000"/>
               </a:lnSpc>
@@ -4476,7 +4476,7 @@
                 <a:sym typeface="Arial"/>
               </a:defRPr>
             </a:lvl2pPr>
-            <a:lvl3pPr indent="-355600" lvl="2" marL="1371600" algn="just">
+            <a:lvl3pPr indent="-355600" lvl="2" marL="1371600" algn="l">
               <a:lnSpc>
                 <a:spcPct val="130000"/>
               </a:lnSpc>
@@ -4498,7 +4498,7 @@
                 <a:sym typeface="Arial"/>
               </a:defRPr>
             </a:lvl3pPr>
-            <a:lvl4pPr indent="-342900" lvl="3" marL="1828800" algn="just">
+            <a:lvl4pPr indent="-342900" lvl="3" marL="1828800" algn="l">
               <a:lnSpc>
                 <a:spcPct val="130000"/>
               </a:lnSpc>
@@ -4520,7 +4520,7 @@
                 <a:sym typeface="Arial"/>
               </a:defRPr>
             </a:lvl4pPr>
-            <a:lvl5pPr indent="-342900" lvl="4" marL="2286000" algn="just">
+            <a:lvl5pPr indent="-342900" lvl="4" marL="2286000" algn="l">
               <a:lnSpc>
                 <a:spcPct val="130000"/>
               </a:lnSpc>
@@ -7001,7 +7001,7 @@
             <a:normAutofit/>
           </a:bodyPr>
           <a:lstStyle>
-            <a:lvl1pPr indent="-406400" lvl="0" marL="457200" algn="just">
+            <a:lvl1pPr indent="-406400" lvl="0" marL="457200" algn="l">
               <a:lnSpc>
                 <a:spcPct val="130000"/>
               </a:lnSpc>
@@ -7023,7 +7023,7 @@
                 <a:sym typeface="Arial"/>
               </a:defRPr>
             </a:lvl1pPr>
-            <a:lvl2pPr indent="-381000" lvl="1" marL="914400" algn="just">
+            <a:lvl2pPr indent="-381000" lvl="1" marL="914400" algn="l">
               <a:lnSpc>
                 <a:spcPct val="130000"/>
               </a:lnSpc>
@@ -7045,7 +7045,7 @@
                 <a:sym typeface="Arial"/>
               </a:defRPr>
             </a:lvl2pPr>
-            <a:lvl3pPr indent="-355600" lvl="2" marL="1371600" algn="just">
+            <a:lvl3pPr indent="-355600" lvl="2" marL="1371600" algn="l">
               <a:lnSpc>
                 <a:spcPct val="130000"/>
               </a:lnSpc>
@@ -7067,7 +7067,7 @@
                 <a:sym typeface="Arial"/>
               </a:defRPr>
             </a:lvl3pPr>
-            <a:lvl4pPr indent="-342900" lvl="3" marL="1828800" algn="just">
+            <a:lvl4pPr indent="-342900" lvl="3" marL="1828800" algn="l">
               <a:lnSpc>
                 <a:spcPct val="130000"/>
               </a:lnSpc>
@@ -7089,7 +7089,7 @@
                 <a:sym typeface="Arial"/>
               </a:defRPr>
             </a:lvl4pPr>
-            <a:lvl5pPr indent="-342900" lvl="4" marL="2286000" algn="just">
+            <a:lvl5pPr indent="-342900" lvl="4" marL="2286000" algn="l">
               <a:lnSpc>
                 <a:spcPct val="130000"/>
               </a:lnSpc>
@@ -8197,7 +8197,7 @@
             <a:normAutofit/>
           </a:bodyPr>
           <a:lstStyle>
-            <a:lvl1pPr indent="-406400" lvl="0" marL="457200" algn="just">
+            <a:lvl1pPr indent="-406400" lvl="0" marL="457200" algn="l">
               <a:lnSpc>
                 <a:spcPct val="130000"/>
               </a:lnSpc>
@@ -8219,7 +8219,7 @@
                 <a:sym typeface="Arial"/>
               </a:defRPr>
             </a:lvl1pPr>
-            <a:lvl2pPr indent="-381000" lvl="1" marL="914400" algn="just">
+            <a:lvl2pPr indent="-381000" lvl="1" marL="914400" algn="l">
               <a:lnSpc>
                 <a:spcPct val="130000"/>
               </a:lnSpc>
@@ -8241,7 +8241,7 @@
                 <a:sym typeface="Arial"/>
               </a:defRPr>
             </a:lvl2pPr>
-            <a:lvl3pPr indent="-355600" lvl="2" marL="1371600" algn="just">
+            <a:lvl3pPr indent="-355600" lvl="2" marL="1371600" algn="l">
               <a:lnSpc>
                 <a:spcPct val="130000"/>
               </a:lnSpc>
@@ -8263,7 +8263,7 @@
                 <a:sym typeface="Arial"/>
               </a:defRPr>
             </a:lvl3pPr>
-            <a:lvl4pPr indent="-342900" lvl="3" marL="1828800" algn="just">
+            <a:lvl4pPr indent="-342900" lvl="3" marL="1828800" algn="l">
               <a:lnSpc>
                 <a:spcPct val="130000"/>
               </a:lnSpc>
@@ -8285,7 +8285,7 @@
                 <a:sym typeface="Arial"/>
               </a:defRPr>
             </a:lvl4pPr>
-            <a:lvl5pPr indent="-342900" lvl="4" marL="2286000" algn="just">
+            <a:lvl5pPr indent="-342900" lvl="4" marL="2286000" algn="l">
               <a:lnSpc>
                 <a:spcPct val="130000"/>
               </a:lnSpc>
@@ -17783,7 +17783,7 @@
             <a:normAutofit/>
           </a:bodyPr>
           <a:lstStyle>
-            <a:lvl1pPr indent="-368300" lvl="0" marL="457200" algn="just">
+            <a:lvl1pPr indent="-368300" lvl="0" marL="457200" algn="l">
               <a:lnSpc>
                 <a:spcPct val="90000"/>
               </a:lnSpc>
@@ -18750,7 +18750,7 @@
             <a:normAutofit/>
           </a:bodyPr>
           <a:lstStyle>
-            <a:lvl1pPr indent="-406400" lvl="0" marL="457200" algn="just">
+            <a:lvl1pPr indent="-406400" lvl="0" marL="457200" algn="l">
               <a:lnSpc>
                 <a:spcPct val="130000"/>
               </a:lnSpc>
@@ -18772,7 +18772,7 @@
                 <a:sym typeface="Arial"/>
               </a:defRPr>
             </a:lvl1pPr>
-            <a:lvl2pPr indent="-381000" lvl="1" marL="914400" algn="just">
+            <a:lvl2pPr indent="-381000" lvl="1" marL="914400" algn="l">
               <a:lnSpc>
                 <a:spcPct val="130000"/>
               </a:lnSpc>
@@ -18794,7 +18794,7 @@
                 <a:sym typeface="Arial"/>
               </a:defRPr>
             </a:lvl2pPr>
-            <a:lvl3pPr indent="-355600" lvl="2" marL="1371600" algn="just">
+            <a:lvl3pPr indent="-355600" lvl="2" marL="1371600" algn="l">
               <a:lnSpc>
                 <a:spcPct val="130000"/>
               </a:lnSpc>
@@ -18816,7 +18816,7 @@
                 <a:sym typeface="Arial"/>
               </a:defRPr>
             </a:lvl3pPr>
-            <a:lvl4pPr indent="-342900" lvl="3" marL="1828800" algn="just">
+            <a:lvl4pPr indent="-342900" lvl="3" marL="1828800" algn="l">
               <a:lnSpc>
                 <a:spcPct val="130000"/>
               </a:lnSpc>
@@ -18838,7 +18838,7 @@
                 <a:sym typeface="Arial"/>
               </a:defRPr>
             </a:lvl4pPr>
-            <a:lvl5pPr indent="-342900" lvl="4" marL="2286000" algn="just">
+            <a:lvl5pPr indent="-342900" lvl="4" marL="2286000" algn="l">
               <a:lnSpc>
                 <a:spcPct val="130000"/>
               </a:lnSpc>
@@ -21763,7 +21763,7 @@
             <a:normAutofit/>
           </a:bodyPr>
           <a:lstStyle>
-            <a:lvl1pPr indent="-406400" lvl="0" marL="457200" algn="just">
+            <a:lvl1pPr indent="-406400" lvl="0" marL="457200" algn="l">
               <a:lnSpc>
                 <a:spcPct val="130000"/>
               </a:lnSpc>
@@ -21785,7 +21785,7 @@
                 <a:sym typeface="Arial"/>
               </a:defRPr>
             </a:lvl1pPr>
-            <a:lvl2pPr indent="-381000" lvl="1" marL="914400" algn="just">
+            <a:lvl2pPr indent="-381000" lvl="1" marL="914400" algn="l">
               <a:lnSpc>
                 <a:spcPct val="130000"/>
               </a:lnSpc>
@@ -21807,7 +21807,7 @@
                 <a:sym typeface="Arial"/>
               </a:defRPr>
             </a:lvl2pPr>
-            <a:lvl3pPr indent="-355600" lvl="2" marL="1371600" algn="just">
+            <a:lvl3pPr indent="-355600" lvl="2" marL="1371600" algn="l">
               <a:lnSpc>
                 <a:spcPct val="130000"/>
               </a:lnSpc>
@@ -21829,7 +21829,7 @@
                 <a:sym typeface="Arial"/>
               </a:defRPr>
             </a:lvl3pPr>
-            <a:lvl4pPr indent="-342900" lvl="3" marL="1828800" algn="just">
+            <a:lvl4pPr indent="-342900" lvl="3" marL="1828800" algn="l">
               <a:lnSpc>
                 <a:spcPct val="130000"/>
               </a:lnSpc>
@@ -21851,7 +21851,7 @@
                 <a:sym typeface="Arial"/>
               </a:defRPr>
             </a:lvl4pPr>
-            <a:lvl5pPr indent="-342900" lvl="4" marL="2286000" algn="just">
+            <a:lvl5pPr indent="-342900" lvl="4" marL="2286000" algn="l">
               <a:lnSpc>
                 <a:spcPct val="130000"/>
               </a:lnSpc>
@@ -24332,7 +24332,7 @@
             <a:normAutofit/>
           </a:bodyPr>
           <a:lstStyle>
-            <a:lvl1pPr indent="-406400" lvl="0" marL="457200" algn="just">
+            <a:lvl1pPr indent="-406400" lvl="0" marL="457200" algn="l">
               <a:lnSpc>
                 <a:spcPct val="130000"/>
               </a:lnSpc>
@@ -24354,7 +24354,7 @@
                 <a:sym typeface="Arial"/>
               </a:defRPr>
             </a:lvl1pPr>
-            <a:lvl2pPr indent="-381000" lvl="1" marL="914400" algn="just">
+            <a:lvl2pPr indent="-381000" lvl="1" marL="914400" algn="l">
               <a:lnSpc>
                 <a:spcPct val="130000"/>
               </a:lnSpc>
@@ -24376,7 +24376,7 @@
                 <a:sym typeface="Arial"/>
               </a:defRPr>
             </a:lvl2pPr>
-            <a:lvl3pPr indent="-355600" lvl="2" marL="1371600" algn="just">
+            <a:lvl3pPr indent="-355600" lvl="2" marL="1371600" algn="l">
               <a:lnSpc>
                 <a:spcPct val="130000"/>
               </a:lnSpc>
@@ -24398,7 +24398,7 @@
                 <a:sym typeface="Arial"/>
               </a:defRPr>
             </a:lvl3pPr>
-            <a:lvl4pPr indent="-342900" lvl="3" marL="1828800" algn="just">
+            <a:lvl4pPr indent="-342900" lvl="3" marL="1828800" algn="l">
               <a:lnSpc>
                 <a:spcPct val="130000"/>
               </a:lnSpc>
@@ -24420,7 +24420,7 @@
                 <a:sym typeface="Arial"/>
               </a:defRPr>
             </a:lvl4pPr>
-            <a:lvl5pPr indent="-342900" lvl="4" marL="2286000" algn="just">
+            <a:lvl5pPr indent="-342900" lvl="4" marL="2286000" algn="l">
               <a:lnSpc>
                 <a:spcPct val="130000"/>
               </a:lnSpc>
@@ -31455,7 +31455,7 @@
             <a:normAutofit/>
           </a:bodyPr>
           <a:lstStyle>
-            <a:lvl1pPr indent="-406400" lvl="0" marL="457200" algn="just">
+            <a:lvl1pPr indent="-406400" lvl="0" marL="457200" algn="l">
               <a:lnSpc>
                 <a:spcPct val="130000"/>
               </a:lnSpc>
@@ -40178,7 +40178,7 @@
             <a:normAutofit/>
           </a:bodyPr>
           <a:lstStyle>
-            <a:lvl1pPr indent="-406400" lvl="0" marL="457200" algn="just">
+            <a:lvl1pPr indent="-406400" lvl="0" marL="457200" algn="l">
               <a:lnSpc>
                 <a:spcPct val="130000"/>
               </a:lnSpc>
@@ -40200,7 +40200,7 @@
                 <a:sym typeface="Arial"/>
               </a:defRPr>
             </a:lvl1pPr>
-            <a:lvl2pPr indent="-381000" lvl="1" marL="914400" algn="just">
+            <a:lvl2pPr indent="-381000" lvl="1" marL="914400" algn="l">
               <a:lnSpc>
                 <a:spcPct val="130000"/>
               </a:lnSpc>
@@ -40222,7 +40222,7 @@
                 <a:sym typeface="Arial"/>
               </a:defRPr>
             </a:lvl2pPr>
-            <a:lvl3pPr indent="-355600" lvl="2" marL="1371600" algn="just">
+            <a:lvl3pPr indent="-355600" lvl="2" marL="1371600" algn="l">
               <a:lnSpc>
                 <a:spcPct val="130000"/>
               </a:lnSpc>
@@ -40244,7 +40244,7 @@
                 <a:sym typeface="Arial"/>
               </a:defRPr>
             </a:lvl3pPr>
-            <a:lvl4pPr indent="-342900" lvl="3" marL="1828800" algn="just">
+            <a:lvl4pPr indent="-342900" lvl="3" marL="1828800" algn="l">
               <a:lnSpc>
                 <a:spcPct val="130000"/>
               </a:lnSpc>
@@ -40266,7 +40266,7 @@
                 <a:sym typeface="Arial"/>
               </a:defRPr>
             </a:lvl4pPr>
-            <a:lvl5pPr indent="-342900" lvl="4" marL="2286000" algn="just">
+            <a:lvl5pPr indent="-342900" lvl="4" marL="2286000" algn="l">
               <a:lnSpc>
                 <a:spcPct val="130000"/>
               </a:lnSpc>
@@ -42747,7 +42747,7 @@
             <a:normAutofit/>
           </a:bodyPr>
           <a:lstStyle>
-            <a:lvl1pPr indent="-406400" lvl="0" marL="457200" algn="just">
+            <a:lvl1pPr indent="-406400" lvl="0" marL="457200" algn="l">
               <a:lnSpc>
                 <a:spcPct val="130000"/>
               </a:lnSpc>
@@ -42769,7 +42769,7 @@
                 <a:sym typeface="Arial"/>
               </a:defRPr>
             </a:lvl1pPr>
-            <a:lvl2pPr indent="-381000" lvl="1" marL="914400" algn="just">
+            <a:lvl2pPr indent="-381000" lvl="1" marL="914400" algn="l">
               <a:lnSpc>
                 <a:spcPct val="130000"/>
               </a:lnSpc>
@@ -42791,7 +42791,7 @@
                 <a:sym typeface="Arial"/>
               </a:defRPr>
             </a:lvl2pPr>
-            <a:lvl3pPr indent="-355600" lvl="2" marL="1371600" algn="just">
+            <a:lvl3pPr indent="-355600" lvl="2" marL="1371600" algn="l">
               <a:lnSpc>
                 <a:spcPct val="130000"/>
               </a:lnSpc>
@@ -42813,7 +42813,7 @@
                 <a:sym typeface="Arial"/>
               </a:defRPr>
             </a:lvl3pPr>
-            <a:lvl4pPr indent="-342900" lvl="3" marL="1828800" algn="just">
+            <a:lvl4pPr indent="-342900" lvl="3" marL="1828800" algn="l">
               <a:lnSpc>
                 <a:spcPct val="130000"/>
               </a:lnSpc>
@@ -42835,7 +42835,7 @@
                 <a:sym typeface="Arial"/>
               </a:defRPr>
             </a:lvl4pPr>
-            <a:lvl5pPr indent="-342900" lvl="4" marL="2286000" algn="just">
+            <a:lvl5pPr indent="-342900" lvl="4" marL="2286000" algn="l">
               <a:lnSpc>
                 <a:spcPct val="130000"/>
               </a:lnSpc>

--- a/docs/slides/template-uit.pptx
+++ b/docs/slides/template-uit.pptx
@@ -8045,8 +8045,8 @@
         </p:nvSpPr>
         <p:spPr>
           <a:xfrm>
-            <a:off x="774146" y="202009"/>
-            <a:ext cx="3932227" cy="1698043"/>
+            <a:off x="771525" y="200025"/>
+            <a:ext cx="10582275" cy="790575"/>
           </a:xfrm>
           <a:prstGeom prst="rect">
             <a:avLst/>
@@ -8181,8 +8181,8 @@
         </p:nvSpPr>
         <p:spPr>
           <a:xfrm>
-            <a:off x="774144" y="2113808"/>
-            <a:ext cx="3932227" cy="4063156"/>
+            <a:off x="771525" y="1066800"/>
+            <a:ext cx="10582275" cy="1066800"/>
           </a:xfrm>
           <a:prstGeom prst="rect">
             <a:avLst/>
@@ -10750,8 +10750,8 @@
         </p:nvSpPr>
         <p:spPr>
           <a:xfrm>
-            <a:off x="5160373" y="202009"/>
-            <a:ext cx="6237261" cy="5976999"/>
+            <a:off x="771525" y="2209800"/>
+            <a:ext cx="10582275" cy="3962400"/>
           </a:xfrm>
           <a:prstGeom prst="roundRect">
             <a:avLst>

--- a/docs/slides/template-uit.pptx
+++ b/docs/slides/template-uit.pptx
@@ -8182,7 +8182,7 @@
         <p:spPr>
           <a:xfrm>
             <a:off x="771525" y="1066800"/>
-            <a:ext cx="10582275" cy="1066800"/>
+            <a:ext cx="10582275" cy="1181100"/>
           </a:xfrm>
           <a:prstGeom prst="rect">
             <a:avLst/>
@@ -10750,8 +10750,8 @@
         </p:nvSpPr>
         <p:spPr>
           <a:xfrm>
-            <a:off x="771525" y="2209800"/>
-            <a:ext cx="10582275" cy="3962400"/>
+            <a:off x="771525" y="2324100"/>
+            <a:ext cx="10582275" cy="3848100"/>
           </a:xfrm>
           <a:prstGeom prst="roundRect">
             <a:avLst>
